--- a/courses/俄语课件/俄语_Day5_L1.pptx
+++ b/courses/俄语课件/俄语_Day5_L1.pptx
@@ -3199,66 +3199,14 @@
               </a:defRPr>
             </a:pPr>
             <a:r>
-              <a:t>名词第6格</a:t>
-            </a:r>
-          </a:p>
-        </p:txBody>
-      </p:sp>
-      <p:sp>
-        <p:nvSpPr>
-          <p:cNvPr id="5" name="Rounded Rectangle 4"/>
-          <p:cNvSpPr/>
-          <p:nvPr/>
-        </p:nvSpPr>
-        <p:spPr>
-          <a:xfrm>
-            <a:off x="1828800" y="4572000"/>
-            <a:ext cx="5486400" cy="731520"/>
-          </a:xfrm>
-          <a:prstGeom prst="roundRect">
-            <a:avLst/>
-          </a:prstGeom>
-          <a:solidFill>
-            <a:srgbClr val="4682B4"/>
-          </a:solidFill>
-          <a:ln>
-            <a:noFill/>
-          </a:ln>
-        </p:spPr>
-        <p:style>
-          <a:lnRef idx="1">
-            <a:schemeClr val="accent1"/>
-          </a:lnRef>
-          <a:fillRef idx="3">
-            <a:schemeClr val="accent1"/>
-          </a:fillRef>
-          <a:effectRef idx="2">
-            <a:schemeClr val="accent1"/>
-          </a:effectRef>
-          <a:fontRef idx="minor">
-            <a:schemeClr val="lt1"/>
-          </a:fontRef>
-        </p:style>
-        <p:txBody>
-          <a:bodyPr rtlCol="0" anchor="ctr"/>
-          <a:lstStyle/>
-          <a:p>
-            <a:pPr algn="ctr">
-              <a:defRPr sz="2200">
-                <a:solidFill>
-                  <a:srgbClr val="FFFFFF"/>
-                </a:solidFill>
-              </a:defRPr>
-            </a:pPr>
-            <a:r>
-              <a:t>Predlozhny padesh</a:t>
-            </a:r>
-          </a:p>
-        </p:txBody>
-      </p:sp>
-      <p:sp>
-        <p:nvSpPr>
-          <p:cNvPr id="6" name="TextBox 5"/>
+              <a:t>名词第6格（关于什么）</a:t>
+            </a:r>
+          </a:p>
+        </p:txBody>
+      </p:sp>
+      <p:sp>
+        <p:nvSpPr>
+          <p:cNvPr id="5" name="TextBox 4"/>
           <p:cNvSpPr txBox="1"/>
           <p:nvPr/>
         </p:nvSpPr>
@@ -3286,7 +3234,7 @@
               </a:defRPr>
             </a:pPr>
             <a:r>
-              <a:t>Day5/84</a:t>
+              <a:t>День 5/84</a:t>
             </a:r>
           </a:p>
         </p:txBody>
@@ -3417,7 +3365,7 @@
               </a:defRPr>
             </a:pPr>
             <a:r>
-              <a:t>Predlozhny padesh</a:t>
+              <a:t>Предложный падеж</a:t>
             </a:r>
           </a:p>
         </p:txBody>
@@ -3487,7 +3435,7 @@
               </a:defRPr>
             </a:pPr>
             <a:r>
-              <a:t>常用前置词：в/на (在...里/上)</a:t>
+              <a:t>常用前置词：в / на (在...里/上)</a:t>
             </a:r>
           </a:p>
         </p:txBody>
@@ -3539,7 +3487,7 @@
               </a:defRPr>
             </a:pPr>
             <a:r>
-              <a:t>Kniga na stole. = 书在桌子上。</a:t>
+              <a:t>Книга на столе. = 书在桌子上。</a:t>
             </a:r>
           </a:p>
         </p:txBody>
@@ -3591,7 +3539,7 @@
               </a:defRPr>
             </a:pPr>
             <a:r>
-              <a:t>Ya v universitete. = 我在大学里。</a:t>
+              <a:t>Я в университете. = 我在大学里。</a:t>
             </a:r>
           </a:p>
         </p:txBody>
@@ -3643,7 +3591,7 @@
               </a:defRPr>
             </a:pPr>
             <a:r>
-              <a:t>第6格回答问题：o kom? o chem? (关于谁？关于什么？)</a:t>
+              <a:t>第6格回答问题：о ком? о чём? (关于谁？关于什么？)</a:t>
             </a:r>
           </a:p>
         </p:txBody>
@@ -3678,7 +3626,7 @@
               </a:defRPr>
             </a:pPr>
             <a:r>
-              <a:t>Day5/84</a:t>
+              <a:t>День 5/84</a:t>
             </a:r>
           </a:p>
         </p:txBody>
@@ -3809,7 +3757,7 @@
               </a:defRPr>
             </a:pPr>
             <a:r>
-              <a:t>Sklonenie</a:t>
+              <a:t>Склонение</a:t>
             </a:r>
           </a:p>
         </p:txBody>
@@ -3879,7 +3827,7 @@
               </a:defRPr>
             </a:pPr>
             <a:r>
-              <a:t>student &gt; v universitete (在大学里)</a:t>
+              <a:t>студдент → в университете (在大学里)</a:t>
             </a:r>
           </a:p>
         </p:txBody>
@@ -3914,7 +3862,7 @@
               </a:defRPr>
             </a:pPr>
             <a:r>
-              <a:t>okno &gt; na okne (在窗户上)</a:t>
+              <a:t>окно → на окне (在窗户上)</a:t>
             </a:r>
           </a:p>
         </p:txBody>
@@ -3984,7 +3932,7 @@
               </a:defRPr>
             </a:pPr>
             <a:r>
-              <a:t>kniga &gt; v knige (在书里)</a:t>
+              <a:t>книга → в книге (在书里)</a:t>
             </a:r>
           </a:p>
         </p:txBody>
@@ -4019,7 +3967,7 @@
               </a:defRPr>
             </a:pPr>
             <a:r>
-              <a:t>devushka &gt; o devushke (关于姑娘)</a:t>
+              <a:t>девушка → о девушке (关于姑娘)</a:t>
             </a:r>
           </a:p>
         </p:txBody>
@@ -4071,7 +4019,7 @@
               </a:defRPr>
             </a:pPr>
             <a:r>
-              <a:t>规律：加 -e 或 -i</a:t>
+              <a:t>规律：加 -е 或 -и</a:t>
             </a:r>
           </a:p>
         </p:txBody>
@@ -4106,7 +4054,7 @@
               </a:defRPr>
             </a:pPr>
             <a:r>
-              <a:t>Day5/84</a:t>
+              <a:t>День 5/84</a:t>
             </a:r>
           </a:p>
         </p:txBody>
@@ -4237,7 +4185,7 @@
               </a:defRPr>
             </a:pPr>
             <a:r>
-              <a:t>Uprazhneniya</a:t>
+              <a:t>Упражнения</a:t>
             </a:r>
           </a:p>
         </p:txBody>
@@ -4307,7 +4255,7 @@
               </a:defRPr>
             </a:pPr>
             <a:r>
-              <a:t>   dom, kniga, student, okno</a:t>
+              <a:t>   дом, книга, студдент, окно</a:t>
             </a:r>
           </a:p>
         </p:txBody>
@@ -4409,7 +4357,7 @@
               </a:defRPr>
             </a:pPr>
             <a:r>
-              <a:t>   Ya idu ___ (дом).</a:t>
+              <a:t>   Я иду ___ (дом).</a:t>
             </a:r>
           </a:p>
         </p:txBody>
@@ -4444,7 +4392,7 @@
               </a:defRPr>
             </a:pPr>
             <a:r>
-              <a:t>   Kniga lezhit ___ (стол).</a:t>
+              <a:t>   Книга лежит ___ (стол).</a:t>
             </a:r>
           </a:p>
         </p:txBody>
@@ -4479,7 +4427,7 @@
               </a:defRPr>
             </a:pPr>
             <a:r>
-              <a:t>   Ya pomogayu ___ (друг).</a:t>
+              <a:t>   Я помогаю ___ (друг).</a:t>
             </a:r>
           </a:p>
         </p:txBody>
@@ -4514,7 +4462,7 @@
               </a:defRPr>
             </a:pPr>
             <a:r>
-              <a:t>Day5/84</a:t>
+              <a:t>День 5/84</a:t>
             </a:r>
           </a:p>
         </p:txBody>
